--- a/docs/友商调研/业界方案洞察-NI-洞察重写-v2.pptx
+++ b/docs/友商调研/业界方案洞察-NI-洞察重写-v2.pptx
@@ -3540,7 +3540,7 @@
               </a:lnSpc>
             </a:pPr>
             <a:r>
-              <a:rPr sz="819" b="1" i="0">
+              <a:rPr sz="940" b="1" i="0">
                 <a:solidFill>
                   <a:srgbClr val="8B1A1A"/>
                 </a:solidFill>
@@ -6162,7 +6162,7 @@
               </a:lnSpc>
             </a:pPr>
             <a:r>
-              <a:rPr sz="819" b="1" i="0">
+              <a:rPr sz="940" b="1" i="0">
                 <a:solidFill>
                   <a:srgbClr val="1F3F66"/>
                 </a:solidFill>
@@ -6265,7 +6265,7 @@
       </p:sp>
       <p:pic>
         <p:nvPicPr>
-          <p:cNvPr id="82" name="Picture 81" descr="ic_ts.jpg"/>
+          <p:cNvPr id="82" name="Picture 81" descr="ni_TestStand.jpg"/>
           <p:cNvPicPr>
             <a:picLocks noChangeAspect="1"/>
           </p:cNvPicPr>
@@ -6279,8 +6279,8 @@
         </p:blipFill>
         <p:spPr>
           <a:xfrm>
-            <a:off x="530352" y="5007597"/>
-            <a:ext cx="420624" cy="226085"/>
+            <a:off x="557784" y="4937759"/>
+            <a:ext cx="365760" cy="365760"/>
           </a:xfrm>
           <a:prstGeom prst="rect">
             <a:avLst/>
@@ -6497,7 +6497,7 @@
       </p:sp>
       <p:pic>
         <p:nvPicPr>
-          <p:cNvPr id="88" name="Picture 87" descr="ic_lv.jpg"/>
+          <p:cNvPr id="88" name="Picture 87" descr="ni_LabVIEW.jpg"/>
           <p:cNvPicPr>
             <a:picLocks noChangeAspect="1"/>
           </p:cNvPicPr>
@@ -6511,8 +6511,8 @@
         </p:blipFill>
         <p:spPr>
           <a:xfrm>
-            <a:off x="530352" y="5464797"/>
-            <a:ext cx="420624" cy="226085"/>
+            <a:off x="557784" y="5394959"/>
+            <a:ext cx="365760" cy="365760"/>
           </a:xfrm>
           <a:prstGeom prst="rect">
             <a:avLst/>
@@ -6729,7 +6729,7 @@
       </p:sp>
       <p:pic>
         <p:nvPicPr>
-          <p:cNvPr id="94" name="Picture 93" descr="ic_tsm.jpg"/>
+          <p:cNvPr id="94" name="Picture 93" descr="ni_TSM.jpg"/>
           <p:cNvPicPr>
             <a:picLocks noChangeAspect="1"/>
           </p:cNvPicPr>
@@ -6743,8 +6743,8 @@
         </p:blipFill>
         <p:spPr>
           <a:xfrm>
-            <a:off x="530352" y="5945657"/>
-            <a:ext cx="420624" cy="178765"/>
+            <a:off x="557784" y="5852159"/>
+            <a:ext cx="365760" cy="365760"/>
           </a:xfrm>
           <a:prstGeom prst="rect">
             <a:avLst/>
@@ -6923,7 +6923,7 @@
         </p:nvSpPr>
         <p:spPr>
           <a:xfrm>
-            <a:off x="6345936" y="1554480"/>
+            <a:off x="6345936" y="1591056"/>
             <a:ext cx="5321808" cy="173736"/>
           </a:xfrm>
           <a:prstGeom prst="rect">
@@ -6943,7 +6943,7 @@
               </a:lnSpc>
             </a:pPr>
             <a:r>
-              <a:rPr sz="819" b="1" i="0">
+              <a:rPr sz="1150" b="1" i="0">
                 <a:solidFill>
                   <a:srgbClr val="8B1A1A"/>
                 </a:solidFill>
@@ -6964,7 +6964,7 @@
         </p:nvSpPr>
         <p:spPr>
           <a:xfrm>
-            <a:off x="6345936" y="1751076"/>
+            <a:off x="6345936" y="1787652"/>
             <a:ext cx="5321808" cy="9144"/>
           </a:xfrm>
           <a:prstGeom prst="rect">
@@ -7008,8 +7008,8 @@
         </p:nvSpPr>
         <p:spPr>
           <a:xfrm>
-            <a:off x="6345936" y="1810512"/>
-            <a:ext cx="5321808" cy="1773936"/>
+            <a:off x="6345936" y="1938528"/>
+            <a:ext cx="5321808" cy="1572768"/>
           </a:xfrm>
           <a:prstGeom prst="rect">
             <a:avLst/>
@@ -7024,11 +7024,11 @@
           <a:p>
             <a:pPr algn="l">
               <a:lnSpc>
-                <a:spcPct val="168000"/>
+                <a:spcPct val="170000"/>
               </a:lnSpc>
             </a:pPr>
             <a:r>
-              <a:rPr sz="840" b="0" i="0">
+              <a:rPr sz="1200" b="0" i="0">
                 <a:solidFill>
                   <a:srgbClr val="2A2A2A"/>
                 </a:solidFill>
@@ -7036,10 +7036,10 @@
                 <a:ea typeface="微软雅黑"/>
                 <a:cs typeface="微软雅黑"/>
               </a:rPr>
-              <a:t>NI 的软件拓扑是一个</a:t>
-            </a:r>
-            <a:r>
-              <a:rPr sz="840" b="1" i="0">
+              <a:t>NI 把测试软件分成五层：最上面是产线与数据，接着是管测试流程的，再往下是写测试程序的、连仪器的，最下面是机箱与仪器本身。规则只有一条——</a:t>
+            </a:r>
+            <a:r>
+              <a:rPr sz="1200" b="1" i="0">
                 <a:solidFill>
                   <a:srgbClr val="1B5EA8"/>
                 </a:solidFill>
@@ -7047,10 +7047,10 @@
                 <a:ea typeface="微软雅黑"/>
                 <a:cs typeface="微软雅黑"/>
               </a:rPr>
-              <a:t>五层单向依赖</a:t>
-            </a:r>
-            <a:r>
-              <a:rPr sz="840" b="0" i="0">
+              <a:t>上层调用紧邻的下层，下层不反过来依赖上层</a:t>
+            </a:r>
+            <a:r>
+              <a:rPr sz="1200" b="0" i="0">
                 <a:solidFill>
                   <a:srgbClr val="2A2A2A"/>
                 </a:solidFill>
@@ -7058,51 +7058,7 @@
                 <a:ea typeface="微软雅黑"/>
                 <a:cs typeface="微软雅黑"/>
               </a:rPr>
-              <a:t>的结构：最上为业务与数据（MES、程序库、结果库、分析平台），其下为测试执行（TestStand 与 TSM），再下为测量开发（LabVIEW 程序），再下为仪器访问（NI-VISA 会话与 IVI 类驱动），最下为硬件承载（PXI 机箱与模块、开关矩阵、外挂仪器）及被测对象（夹具、针床、DUT）。依赖只向下、不向上：上层仅通过相邻下层的</a:t>
-            </a:r>
-            <a:r>
-              <a:rPr sz="840" b="1" i="0">
-                <a:solidFill>
-                  <a:srgbClr val="1B5EA8"/>
-                </a:solidFill>
-                <a:latin typeface="微软雅黑"/>
-                <a:ea typeface="微软雅黑"/>
-                <a:cs typeface="微软雅黑"/>
-              </a:rPr>
-              <a:t>标准接口</a:t>
-            </a:r>
-            <a:r>
-              <a:rPr sz="840" b="0" i="0">
-                <a:solidFill>
-                  <a:srgbClr val="2A2A2A"/>
-                </a:solidFill>
-                <a:latin typeface="微软雅黑"/>
-                <a:ea typeface="微软雅黑"/>
-                <a:cs typeface="微软雅黑"/>
-              </a:rPr>
-              <a:t>调用，任一层的实现被替换，其上层程序的语义不变。该约束带来三个直接效果——仪器选型与测试开发解耦，同一程序可运行于不同厂商、不同形态的仪器；测量逻辑与硬件配置解耦，机型变化以配置完成而非改码；数据格式与测试程序解耦，结果以统一格式（如 STDF）流向 MES 与分析侧。软件拓扑的价值不在分层本身，而在</a:t>
-            </a:r>
-            <a:r>
-              <a:rPr sz="840" b="1" i="0">
-                <a:solidFill>
-                  <a:srgbClr val="1B5EA8"/>
-                </a:solidFill>
-                <a:latin typeface="微软雅黑"/>
-                <a:ea typeface="微软雅黑"/>
-                <a:cs typeface="微软雅黑"/>
-              </a:rPr>
-              <a:t>每层边界处都有可被第三方实现的公开接口</a:t>
-            </a:r>
-            <a:r>
-              <a:rPr sz="840" b="0" i="0">
-                <a:solidFill>
-                  <a:srgbClr val="2A2A2A"/>
-                </a:solidFill>
-                <a:latin typeface="微软雅黑"/>
-                <a:ea typeface="微软雅黑"/>
-                <a:cs typeface="微软雅黑"/>
-              </a:rPr>
-              <a:t>，使平台能够吸纳外部仪器、外部程序与外部分析工具。</a:t>
+              <a:t>。这样换一台仪器，只要最下面的接口没变，上面的测试程序一行都不用改；增加一个机型，也只需换配置。测量结果以统一格式交给产线系统，测试程序不负责出报表。</a:t>
             </a:r>
           </a:p>
         </p:txBody>
@@ -7115,7 +7071,7 @@
         </p:nvSpPr>
         <p:spPr>
           <a:xfrm>
-            <a:off x="6345936" y="3657600"/>
+            <a:off x="6345936" y="3749039"/>
             <a:ext cx="5321808" cy="173736"/>
           </a:xfrm>
           <a:prstGeom prst="rect">
@@ -7135,7 +7091,7 @@
               </a:lnSpc>
             </a:pPr>
             <a:r>
-              <a:rPr sz="819" b="1" i="0">
+              <a:rPr sz="1150" b="1" i="0">
                 <a:solidFill>
                   <a:srgbClr val="8B1A1A"/>
                 </a:solidFill>
@@ -7156,7 +7112,7 @@
         </p:nvSpPr>
         <p:spPr>
           <a:xfrm>
-            <a:off x="6345936" y="3854196"/>
+            <a:off x="6345936" y="3945635"/>
             <a:ext cx="5321808" cy="9144"/>
           </a:xfrm>
           <a:prstGeom prst="rect">
@@ -7200,8 +7156,8 @@
         </p:nvSpPr>
         <p:spPr>
           <a:xfrm>
-            <a:off x="6345936" y="3931920"/>
-            <a:ext cx="5321808" cy="1865376"/>
+            <a:off x="6345936" y="4096512"/>
+            <a:ext cx="5321808" cy="1691640"/>
           </a:xfrm>
           <a:prstGeom prst="rect">
             <a:avLst/>
@@ -7216,11 +7172,11 @@
           <a:p>
             <a:pPr algn="l">
               <a:lnSpc>
-                <a:spcPct val="168000"/>
+                <a:spcPct val="170000"/>
               </a:lnSpc>
             </a:pPr>
             <a:r>
-              <a:rPr sz="840" b="0" i="0">
+              <a:rPr sz="1200" b="0" i="0">
                 <a:solidFill>
                   <a:srgbClr val="2A2A2A"/>
                 </a:solidFill>
@@ -7228,10 +7184,10 @@
                 <a:ea typeface="微软雅黑"/>
                 <a:cs typeface="微软雅黑"/>
               </a:rPr>
-              <a:t>设备虚拟化把仪器从</a:t>
-            </a:r>
-            <a:r>
-              <a:rPr sz="840" b="1" i="0">
+              <a:t>NI 把仪器当作</a:t>
+            </a:r>
+            <a:r>
+              <a:rPr sz="1200" b="1" i="0">
                 <a:solidFill>
                   <a:srgbClr val="1B5EA8"/>
                 </a:solidFill>
@@ -7239,10 +7195,10 @@
                 <a:ea typeface="微软雅黑"/>
                 <a:cs typeface="微软雅黑"/>
               </a:rPr>
-              <a:t>一台设备</a:t>
-            </a:r>
-            <a:r>
-              <a:rPr sz="840" b="0" i="0">
+              <a:t>一组能力</a:t>
+            </a:r>
+            <a:r>
+              <a:rPr sz="1200" b="0" i="0">
                 <a:solidFill>
                   <a:srgbClr val="2A2A2A"/>
                 </a:solidFill>
@@ -7250,10 +7206,10 @@
                 <a:ea typeface="微软雅黑"/>
                 <a:cs typeface="微软雅黑"/>
               </a:rPr>
-              <a:t>变为</a:t>
-            </a:r>
-            <a:r>
-              <a:rPr sz="840" b="1" i="0">
+              <a:t>来看：几个通道、多大范围、多快的采样、怎么触发，而不是一个具体型号。程序按能力写，具体是哪台仪器，由驱动去对应。于是没有实机也能先用仿真设备把流程跑通，联调不必等设备到货；要换仪器，只改驱动与配置；同一套程序在机箱模块和台式仪器上都能用。仪器的差别被收在</a:t>
+            </a:r>
+            <a:r>
+              <a:rPr sz="1200" b="1" i="0">
                 <a:solidFill>
                   <a:srgbClr val="1B5EA8"/>
                 </a:solidFill>
@@ -7261,10 +7217,10 @@
                 <a:ea typeface="微软雅黑"/>
                 <a:cs typeface="微软雅黑"/>
               </a:rPr>
-              <a:t>一组可描述的能力</a:t>
-            </a:r>
-            <a:r>
-              <a:rPr sz="840" b="0" i="0">
+              <a:t>驱动和配置两处</a:t>
+            </a:r>
+            <a:r>
+              <a:rPr sz="1200" b="0" i="0">
                 <a:solidFill>
                   <a:srgbClr val="2A2A2A"/>
                 </a:solidFill>
@@ -7272,95 +7228,7 @@
                 <a:ea typeface="微软雅黑"/>
                 <a:cs typeface="微软雅黑"/>
               </a:rPr>
-              <a:t>：仪器被抽象为通道数、量程、采样率、触发方式与精度等属性的集合，测试程序按能力编写、不按型号编写；具体设备由驱动层声明自身满足哪些能力，因此同一逻辑仪器可映射到不同厂商、不同总线、不同形态的实现上。在此之上给出三个可操作的结果：其一是</a:t>
-            </a:r>
-            <a:r>
-              <a:rPr sz="840" b="1" i="0">
-                <a:solidFill>
-                  <a:srgbClr val="1B5EA8"/>
-                </a:solidFill>
-                <a:latin typeface="微软雅黑"/>
-                <a:ea typeface="微软雅黑"/>
-                <a:cs typeface="微软雅黑"/>
-              </a:rPr>
-              <a:t>仿真</a:t>
-            </a:r>
-            <a:r>
-              <a:rPr sz="840" b="0" i="0">
-                <a:solidFill>
-                  <a:srgbClr val="2A2A2A"/>
-                </a:solidFill>
-                <a:latin typeface="微软雅黑"/>
-                <a:ea typeface="微软雅黑"/>
-                <a:cs typeface="微软雅黑"/>
-              </a:rPr>
-              <a:t>，以仿真设备替代实机即可跑通流程、判定与数据通道，实机到位只替换会话而不改程序，联调期与硬件到货解耦；其二是</a:t>
-            </a:r>
-            <a:r>
-              <a:rPr sz="840" b="1" i="0">
-                <a:solidFill>
-                  <a:srgbClr val="1B5EA8"/>
-                </a:solidFill>
-                <a:latin typeface="微软雅黑"/>
-                <a:ea typeface="微软雅黑"/>
-                <a:cs typeface="微软雅黑"/>
-              </a:rPr>
-              <a:t>互换</a:t>
-            </a:r>
-            <a:r>
-              <a:rPr sz="840" b="0" i="0">
-                <a:solidFill>
-                  <a:srgbClr val="2A2A2A"/>
-                </a:solidFill>
-                <a:latin typeface="微软雅黑"/>
-                <a:ea typeface="微软雅黑"/>
-                <a:cs typeface="微软雅黑"/>
-              </a:rPr>
-              <a:t>，类驱动把同一逻辑仪器指向不同具体驱动，替换仪器只需修改配置并重跑验证项；其三是</a:t>
-            </a:r>
-            <a:r>
-              <a:rPr sz="840" b="1" i="0">
-                <a:solidFill>
-                  <a:srgbClr val="1B5EA8"/>
-                </a:solidFill>
-                <a:latin typeface="微软雅黑"/>
-                <a:ea typeface="微软雅黑"/>
-                <a:cs typeface="微软雅黑"/>
-              </a:rPr>
-              <a:t>跨形态复用</a:t>
-            </a:r>
-            <a:r>
-              <a:rPr sz="840" b="0" i="0">
-                <a:solidFill>
-                  <a:srgbClr val="2A2A2A"/>
-                </a:solidFill>
-                <a:latin typeface="微软雅黑"/>
-                <a:ea typeface="微软雅黑"/>
-                <a:cs typeface="微软雅黑"/>
-              </a:rPr>
-              <a:t>，同一程序既可在 PXI 模块上运行，也可在台式仪器与远程仪器上运行，机型切换由配置完成。其实质是把硬件的物理差异</a:t>
-            </a:r>
-            <a:r>
-              <a:rPr sz="840" b="1" i="0">
-                <a:solidFill>
-                  <a:srgbClr val="1B5EA8"/>
-                </a:solidFill>
-                <a:latin typeface="微软雅黑"/>
-                <a:ea typeface="微软雅黑"/>
-                <a:cs typeface="微软雅黑"/>
-              </a:rPr>
-              <a:t>收敛到驱动与配置两处</a:t>
-            </a:r>
-            <a:r>
-              <a:rPr sz="840" b="0" i="0">
-                <a:solidFill>
-                  <a:srgbClr val="2A2A2A"/>
-                </a:solidFill>
-                <a:latin typeface="微软雅黑"/>
-                <a:ea typeface="微软雅黑"/>
-                <a:cs typeface="微软雅黑"/>
-              </a:rPr>
-              <a:t>，其余各层只看到能力，因而测试能力的演进不再受制于某台具体硬件的生命周期。</a:t>
+              <a:t>，其余部分只看见能力。</a:t>
             </a:r>
           </a:p>
         </p:txBody>
@@ -7401,7 +7269,7 @@
                 <a:ea typeface="微软雅黑"/>
                 <a:cs typeface="微软雅黑"/>
               </a:rPr>
-              <a:t>资料来源：NI 公开产品资料与技术文档（TestStand、LabVIEW、TSM、NI-VISA、IVI、PXI）；英文引文引自 ni.com，中文为直译；架构归纳与洞察结论为本文观点。</a:t>
+              <a:t>资料来源：NI 公开产品资料与技术文档（TestStand、LabVIEW、TSM、NI-VISA、IVI、PXI）；英文引文与产品图标引自 ni.com，中文为直译；架构归纳与洞察结论为本文观点。</a:t>
             </a:r>
           </a:p>
         </p:txBody>
